--- a/decks/sigcompass-reveal.pptx
+++ b/decks/sigcompass-reveal.pptx
@@ -13303,7 +13303,7 @@
         </p:nvSpPr>
         <p:spPr>
           <a:xfrm>
-            <a:off x="813816" y="5596128"/>
+            <a:off x="813816" y="5486400"/>
             <a:ext cx="10570464" cy="164592"/>
           </a:xfrm>
           <a:prstGeom prst="rect">

--- a/decks/sigcompass-reveal.pptx
+++ b/decks/sigcompass-reveal.pptx
@@ -4267,8 +4267,8 @@
         </p:nvSpPr>
         <p:spPr>
           <a:xfrm>
-            <a:off x="2999842" y="2406091"/>
-            <a:ext cx="1681277" cy="1681277"/>
+            <a:off x="1966570" y="2369515"/>
+            <a:ext cx="1772717" cy="1772717"/>
           </a:xfrm>
           <a:prstGeom prst="ellipse">
             <a:avLst/>
@@ -4288,13 +4288,587 @@
           <p:nvPr/>
         </p:nvSpPr>
         <p:spPr>
-          <a:xfrm>
-            <a:off x="3858829" y="2460284"/>
-            <a:ext cx="1152144" cy="384048"/>
+          <a:xfrm rot="2700000">
+            <a:off x="3420242" y="2569688"/>
+            <a:ext cx="118872" cy="118872"/>
+          </a:xfrm>
+          <a:prstGeom prst="triangle">
+            <a:avLst/>
+          </a:prstGeom>
+          <a:solidFill>
+            <a:srgbClr val="C9A227"/>
+          </a:solidFill>
+          <a:ln/>
+        </p:spPr>
+      </p:sp>
+      <p:sp>
+        <p:nvSpPr>
+          <p:cNvPr id="13" name="Shape 11"/>
+          <p:cNvSpPr/>
+          <p:nvPr/>
+        </p:nvSpPr>
+        <p:spPr>
+          <a:xfrm rot="8100000">
+            <a:off x="3420242" y="3823188"/>
+            <a:ext cx="118872" cy="118872"/>
+          </a:xfrm>
+          <a:prstGeom prst="triangle">
+            <a:avLst/>
+          </a:prstGeom>
+          <a:solidFill>
+            <a:srgbClr val="C9A227"/>
+          </a:solidFill>
+          <a:ln/>
+        </p:spPr>
+      </p:sp>
+      <p:sp>
+        <p:nvSpPr>
+          <p:cNvPr id="14" name="Shape 12"/>
+          <p:cNvSpPr/>
+          <p:nvPr/>
+        </p:nvSpPr>
+        <p:spPr>
+          <a:xfrm rot="13500000">
+            <a:off x="2166742" y="3823188"/>
+            <a:ext cx="118872" cy="118872"/>
+          </a:xfrm>
+          <a:prstGeom prst="triangle">
+            <a:avLst/>
+          </a:prstGeom>
+          <a:solidFill>
+            <a:srgbClr val="C9A227"/>
+          </a:solidFill>
+          <a:ln/>
+        </p:spPr>
+      </p:sp>
+      <p:sp>
+        <p:nvSpPr>
+          <p:cNvPr id="15" name="Shape 13"/>
+          <p:cNvSpPr/>
+          <p:nvPr/>
+        </p:nvSpPr>
+        <p:spPr>
+          <a:xfrm rot="18900000">
+            <a:off x="2166742" y="2569688"/>
+            <a:ext cx="118872" cy="118872"/>
+          </a:xfrm>
+          <a:prstGeom prst="triangle">
+            <a:avLst/>
+          </a:prstGeom>
+          <a:solidFill>
+            <a:srgbClr val="C9A227"/>
+          </a:solidFill>
+          <a:ln/>
+        </p:spPr>
+      </p:sp>
+      <p:sp>
+        <p:nvSpPr>
+          <p:cNvPr id="16" name="Shape 14"/>
+          <p:cNvSpPr/>
+          <p:nvPr/>
+        </p:nvSpPr>
+        <p:spPr>
+          <a:xfrm>
+            <a:off x="2338840" y="2741786"/>
+            <a:ext cx="1028176" cy="1028176"/>
+          </a:xfrm>
+          <a:prstGeom prst="ellipse">
+            <a:avLst/>
+          </a:prstGeom>
+          <a:solidFill>
+            <a:srgbClr val="1E808F"/>
+          </a:solidFill>
+          <a:ln/>
+        </p:spPr>
+      </p:sp>
+      <p:sp>
+        <p:nvSpPr>
+          <p:cNvPr id="17" name="Text 15"/>
+          <p:cNvSpPr/>
+          <p:nvPr/>
+        </p:nvSpPr>
+        <p:spPr>
+          <a:xfrm>
+            <a:off x="2384560" y="3074264"/>
+            <a:ext cx="936736" cy="363220"/>
+          </a:xfrm>
+          <a:prstGeom prst="rect">
+            <a:avLst/>
+          </a:prstGeom>
+          <a:noFill/>
+          <a:ln/>
+        </p:spPr>
+        <p:txBody>
+          <a:bodyPr wrap="square" lIns="0" tIns="0" rIns="0" bIns="0" rtlCol="0" anchor="ctr"/>
+          <a:lstStyle/>
+          <a:p>
+            <a:pPr algn="ctr" indent="0" marL="0">
+              <a:lnSpc>
+                <a:spcPct val="102000"/>
+              </a:lnSpc>
+              <a:buNone/>
+            </a:pPr>
+            <a:r>
+              <a:rPr lang="en-US" sz="1100" b="1" dirty="0">
+                <a:solidFill>
+                  <a:srgbClr val="FFFFFF"/>
+                </a:solidFill>
+                <a:latin typeface="Georgia" pitchFamily="34" charset="0"/>
+                <a:ea typeface="Georgia" pitchFamily="34" charset="-122"/>
+                <a:cs typeface="Georgia" pitchFamily="34" charset="-120"/>
+              </a:rPr>
+              <a:t>REVENUE</a:t>
+            </a:r>
+            <a:endParaRPr lang="en-US" sz="1100" dirty="0"/>
+          </a:p>
+          <a:p>
+            <a:pPr algn="ctr" indent="0" marL="0">
+              <a:lnSpc>
+                <a:spcPct val="102000"/>
+              </a:lnSpc>
+              <a:buNone/>
+            </a:pPr>
+            <a:r>
+              <a:rPr lang="en-US" sz="1100" b="1" dirty="0">
+                <a:solidFill>
+                  <a:srgbClr val="FFFFFF"/>
+                </a:solidFill>
+                <a:latin typeface="Georgia" pitchFamily="34" charset="0"/>
+                <a:ea typeface="Georgia" pitchFamily="34" charset="-122"/>
+                <a:cs typeface="Georgia" pitchFamily="34" charset="-120"/>
+              </a:rPr>
+              <a:t>GROWTH</a:t>
+            </a:r>
+            <a:endParaRPr lang="en-US" sz="1100" dirty="0"/>
+          </a:p>
+        </p:txBody>
+      </p:sp>
+      <p:sp>
+        <p:nvSpPr>
+          <p:cNvPr id="18" name="Shape 16"/>
+          <p:cNvSpPr/>
+          <p:nvPr/>
+        </p:nvSpPr>
+        <p:spPr>
+          <a:xfrm>
+            <a:off x="2624328" y="2140915"/>
+            <a:ext cx="457200" cy="457200"/>
+          </a:xfrm>
+          <a:prstGeom prst="ellipse">
+            <a:avLst/>
+          </a:prstGeom>
+          <a:solidFill>
+            <a:srgbClr val="F7F3EA"/>
+          </a:solidFill>
+          <a:ln w="12700">
+            <a:solidFill>
+              <a:srgbClr val="C9A227"/>
+            </a:solidFill>
+            <a:prstDash val="solid"/>
+          </a:ln>
+        </p:spPr>
+      </p:sp>
+      <p:sp>
+        <p:nvSpPr>
+          <p:cNvPr id="19" name="Text 17"/>
+          <p:cNvSpPr/>
+          <p:nvPr/>
+        </p:nvSpPr>
+        <p:spPr>
+          <a:xfrm>
+            <a:off x="2624328" y="2140915"/>
+            <a:ext cx="457200" cy="457200"/>
+          </a:xfrm>
+          <a:prstGeom prst="rect">
+            <a:avLst/>
+          </a:prstGeom>
+          <a:noFill/>
+          <a:ln/>
+        </p:spPr>
+        <p:txBody>
+          <a:bodyPr wrap="square" lIns="0" tIns="0" rIns="0" bIns="0" rtlCol="0" anchor="ctr"/>
+          <a:lstStyle/>
+          <a:p>
+            <a:pPr algn="ctr" indent="0" marL="0">
+              <a:buNone/>
+            </a:pPr>
+            <a:r>
+              <a:rPr lang="en-US" sz="1200" b="1" dirty="0">
+                <a:solidFill>
+                  <a:srgbClr val="8A6D14"/>
+                </a:solidFill>
+                <a:latin typeface="Georgia" pitchFamily="34" charset="0"/>
+                <a:ea typeface="Georgia" pitchFamily="34" charset="-122"/>
+                <a:cs typeface="Georgia" pitchFamily="34" charset="-120"/>
+              </a:rPr>
+              <a:t>01</a:t>
+            </a:r>
+            <a:endParaRPr lang="en-US" sz="1200" dirty="0"/>
+          </a:p>
+        </p:txBody>
+      </p:sp>
+      <p:sp>
+        <p:nvSpPr>
+          <p:cNvPr id="20" name="Text 18"/>
+          <p:cNvSpPr/>
+          <p:nvPr/>
+        </p:nvSpPr>
+        <p:spPr>
+          <a:xfrm>
+            <a:off x="2066544" y="1816303"/>
+            <a:ext cx="1572768" cy="251460"/>
+          </a:xfrm>
+          <a:prstGeom prst="rect">
+            <a:avLst/>
+          </a:prstGeom>
+          <a:noFill/>
+          <a:ln/>
+        </p:spPr>
+        <p:txBody>
+          <a:bodyPr wrap="square" lIns="0" tIns="0" rIns="0" bIns="0" rtlCol="0" anchor="ctr"/>
+          <a:lstStyle/>
+          <a:p>
+            <a:pPr algn="ctr" indent="0" marL="0">
+              <a:buNone/>
+            </a:pPr>
+            <a:r>
+              <a:rPr lang="en-US" sz="1000" b="1" spc="120" kern="0" dirty="0">
+                <a:solidFill>
+                  <a:srgbClr val="8A6D14"/>
+                </a:solidFill>
+                <a:latin typeface="Arial" pitchFamily="34" charset="0"/>
+                <a:ea typeface="Arial" pitchFamily="34" charset="-122"/>
+                <a:cs typeface="Arial" pitchFamily="34" charset="-120"/>
+              </a:rPr>
+              <a:t>MORE BOOKINGS</a:t>
+            </a:r>
+            <a:endParaRPr lang="en-US" sz="1000" dirty="0"/>
+          </a:p>
+        </p:txBody>
+      </p:sp>
+      <p:sp>
+        <p:nvSpPr>
+          <p:cNvPr id="21" name="Shape 19"/>
+          <p:cNvSpPr/>
+          <p:nvPr/>
+        </p:nvSpPr>
+        <p:spPr>
+          <a:xfrm>
+            <a:off x="3510686" y="3027274"/>
+            <a:ext cx="457200" cy="457200"/>
+          </a:xfrm>
+          <a:prstGeom prst="ellipse">
+            <a:avLst/>
+          </a:prstGeom>
+          <a:solidFill>
+            <a:srgbClr val="F7F3EA"/>
+          </a:solidFill>
+          <a:ln w="12700">
+            <a:solidFill>
+              <a:srgbClr val="C9A227"/>
+            </a:solidFill>
+            <a:prstDash val="solid"/>
+          </a:ln>
+        </p:spPr>
+      </p:sp>
+      <p:sp>
+        <p:nvSpPr>
+          <p:cNvPr id="22" name="Text 20"/>
+          <p:cNvSpPr/>
+          <p:nvPr/>
+        </p:nvSpPr>
+        <p:spPr>
+          <a:xfrm>
+            <a:off x="3510686" y="3027274"/>
+            <a:ext cx="457200" cy="457200"/>
+          </a:xfrm>
+          <a:prstGeom prst="rect">
+            <a:avLst/>
+          </a:prstGeom>
+          <a:noFill/>
+          <a:ln/>
+        </p:spPr>
+        <p:txBody>
+          <a:bodyPr wrap="square" lIns="0" tIns="0" rIns="0" bIns="0" rtlCol="0" anchor="ctr"/>
+          <a:lstStyle/>
+          <a:p>
+            <a:pPr algn="ctr" indent="0" marL="0">
+              <a:buNone/>
+            </a:pPr>
+            <a:r>
+              <a:rPr lang="en-US" sz="1200" b="1" dirty="0">
+                <a:solidFill>
+                  <a:srgbClr val="8A6D14"/>
+                </a:solidFill>
+                <a:latin typeface="Georgia" pitchFamily="34" charset="0"/>
+                <a:ea typeface="Georgia" pitchFamily="34" charset="-122"/>
+                <a:cs typeface="Georgia" pitchFamily="34" charset="-120"/>
+              </a:rPr>
+              <a:t>02</a:t>
+            </a:r>
+            <a:endParaRPr lang="en-US" sz="1200" dirty="0"/>
+          </a:p>
+        </p:txBody>
+      </p:sp>
+      <p:sp>
+        <p:nvSpPr>
+          <p:cNvPr id="23" name="Text 21"/>
+          <p:cNvSpPr/>
+          <p:nvPr/>
+        </p:nvSpPr>
+        <p:spPr>
+          <a:xfrm>
+            <a:off x="4095902" y="3130144"/>
+            <a:ext cx="731520" cy="251460"/>
+          </a:xfrm>
+          <a:prstGeom prst="rect">
+            <a:avLst/>
+          </a:prstGeom>
+          <a:noFill/>
+          <a:ln/>
+        </p:spPr>
+        <p:txBody>
+          <a:bodyPr wrap="square" lIns="0" tIns="0" rIns="0" bIns="0" rtlCol="0" anchor="ctr"/>
+          <a:lstStyle/>
+          <a:p>
+            <a:pPr algn="l" indent="0" marL="0">
+              <a:buNone/>
+            </a:pPr>
+            <a:r>
+              <a:rPr lang="en-US" sz="1000" b="1" spc="120" kern="0" dirty="0">
+                <a:solidFill>
+                  <a:srgbClr val="8A6D14"/>
+                </a:solidFill>
+                <a:latin typeface="Arial" pitchFamily="34" charset="0"/>
+                <a:ea typeface="Arial" pitchFamily="34" charset="-122"/>
+                <a:cs typeface="Arial" pitchFamily="34" charset="-120"/>
+              </a:rPr>
+              <a:t>MORE DATA</a:t>
+            </a:r>
+            <a:endParaRPr lang="en-US" sz="1000" dirty="0"/>
+          </a:p>
+        </p:txBody>
+      </p:sp>
+      <p:sp>
+        <p:nvSpPr>
+          <p:cNvPr id="24" name="Shape 22"/>
+          <p:cNvSpPr/>
+          <p:nvPr/>
+        </p:nvSpPr>
+        <p:spPr>
+          <a:xfrm>
+            <a:off x="2624328" y="3913632"/>
+            <a:ext cx="457200" cy="457200"/>
+          </a:xfrm>
+          <a:prstGeom prst="ellipse">
+            <a:avLst/>
+          </a:prstGeom>
+          <a:solidFill>
+            <a:srgbClr val="F7F3EA"/>
+          </a:solidFill>
+          <a:ln w="12700">
+            <a:solidFill>
+              <a:srgbClr val="C9A227"/>
+            </a:solidFill>
+            <a:prstDash val="solid"/>
+          </a:ln>
+        </p:spPr>
+      </p:sp>
+      <p:sp>
+        <p:nvSpPr>
+          <p:cNvPr id="25" name="Text 23"/>
+          <p:cNvSpPr/>
+          <p:nvPr/>
+        </p:nvSpPr>
+        <p:spPr>
+          <a:xfrm>
+            <a:off x="2624328" y="3913632"/>
+            <a:ext cx="457200" cy="457200"/>
+          </a:xfrm>
+          <a:prstGeom prst="rect">
+            <a:avLst/>
+          </a:prstGeom>
+          <a:noFill/>
+          <a:ln/>
+        </p:spPr>
+        <p:txBody>
+          <a:bodyPr wrap="square" lIns="0" tIns="0" rIns="0" bIns="0" rtlCol="0" anchor="ctr"/>
+          <a:lstStyle/>
+          <a:p>
+            <a:pPr algn="ctr" indent="0" marL="0">
+              <a:buNone/>
+            </a:pPr>
+            <a:r>
+              <a:rPr lang="en-US" sz="1200" b="1" dirty="0">
+                <a:solidFill>
+                  <a:srgbClr val="8A6D14"/>
+                </a:solidFill>
+                <a:latin typeface="Georgia" pitchFamily="34" charset="0"/>
+                <a:ea typeface="Georgia" pitchFamily="34" charset="-122"/>
+                <a:cs typeface="Georgia" pitchFamily="34" charset="-120"/>
+              </a:rPr>
+              <a:t>03</a:t>
+            </a:r>
+            <a:endParaRPr lang="en-US" sz="1200" dirty="0"/>
+          </a:p>
+        </p:txBody>
+      </p:sp>
+      <p:sp>
+        <p:nvSpPr>
+          <p:cNvPr id="26" name="Text 24"/>
+          <p:cNvSpPr/>
+          <p:nvPr/>
+        </p:nvSpPr>
+        <p:spPr>
+          <a:xfrm>
+            <a:off x="1784604" y="4443984"/>
+            <a:ext cx="2136648" cy="251460"/>
+          </a:xfrm>
+          <a:prstGeom prst="rect">
+            <a:avLst/>
+          </a:prstGeom>
+          <a:noFill/>
+          <a:ln/>
+        </p:spPr>
+        <p:txBody>
+          <a:bodyPr wrap="square" lIns="0" tIns="0" rIns="0" bIns="0" rtlCol="0" anchor="ctr"/>
+          <a:lstStyle/>
+          <a:p>
+            <a:pPr algn="ctr" indent="0" marL="0">
+              <a:buNone/>
+            </a:pPr>
+            <a:r>
+              <a:rPr lang="en-US" sz="1000" b="1" spc="120" kern="0" dirty="0">
+                <a:solidFill>
+                  <a:srgbClr val="8A6D14"/>
+                </a:solidFill>
+                <a:latin typeface="Arial" pitchFamily="34" charset="0"/>
+                <a:ea typeface="Arial" pitchFamily="34" charset="-122"/>
+                <a:cs typeface="Arial" pitchFamily="34" charset="-120"/>
+              </a:rPr>
+              <a:t>MORE PERSONAL TRIPS</a:t>
+            </a:r>
+            <a:endParaRPr lang="en-US" sz="1000" dirty="0"/>
+          </a:p>
+        </p:txBody>
+      </p:sp>
+      <p:sp>
+        <p:nvSpPr>
+          <p:cNvPr id="27" name="Shape 25"/>
+          <p:cNvSpPr/>
+          <p:nvPr/>
+        </p:nvSpPr>
+        <p:spPr>
+          <a:xfrm>
+            <a:off x="1737970" y="3027274"/>
+            <a:ext cx="457200" cy="457200"/>
+          </a:xfrm>
+          <a:prstGeom prst="ellipse">
+            <a:avLst/>
+          </a:prstGeom>
+          <a:solidFill>
+            <a:srgbClr val="F7F3EA"/>
+          </a:solidFill>
+          <a:ln w="12700">
+            <a:solidFill>
+              <a:srgbClr val="C9A227"/>
+            </a:solidFill>
+            <a:prstDash val="solid"/>
+          </a:ln>
+        </p:spPr>
+      </p:sp>
+      <p:sp>
+        <p:nvSpPr>
+          <p:cNvPr id="28" name="Text 26"/>
+          <p:cNvSpPr/>
+          <p:nvPr/>
+        </p:nvSpPr>
+        <p:spPr>
+          <a:xfrm>
+            <a:off x="1737970" y="3027274"/>
+            <a:ext cx="457200" cy="457200"/>
+          </a:xfrm>
+          <a:prstGeom prst="rect">
+            <a:avLst/>
+          </a:prstGeom>
+          <a:noFill/>
+          <a:ln/>
+        </p:spPr>
+        <p:txBody>
+          <a:bodyPr wrap="square" lIns="0" tIns="0" rIns="0" bIns="0" rtlCol="0" anchor="ctr"/>
+          <a:lstStyle/>
+          <a:p>
+            <a:pPr algn="ctr" indent="0" marL="0">
+              <a:buNone/>
+            </a:pPr>
+            <a:r>
+              <a:rPr lang="en-US" sz="1200" b="1" dirty="0">
+                <a:solidFill>
+                  <a:srgbClr val="8A6D14"/>
+                </a:solidFill>
+                <a:latin typeface="Georgia" pitchFamily="34" charset="0"/>
+                <a:ea typeface="Georgia" pitchFamily="34" charset="-122"/>
+                <a:cs typeface="Georgia" pitchFamily="34" charset="-120"/>
+              </a:rPr>
+              <a:t>04</a:t>
+            </a:r>
+            <a:endParaRPr lang="en-US" sz="1200" dirty="0"/>
+          </a:p>
+        </p:txBody>
+      </p:sp>
+      <p:sp>
+        <p:nvSpPr>
+          <p:cNvPr id="29" name="Text 27"/>
+          <p:cNvSpPr/>
+          <p:nvPr/>
+        </p:nvSpPr>
+        <p:spPr>
+          <a:xfrm>
+            <a:off x="502920" y="3130144"/>
+            <a:ext cx="1107034" cy="251460"/>
+          </a:xfrm>
+          <a:prstGeom prst="rect">
+            <a:avLst/>
+          </a:prstGeom>
+          <a:noFill/>
+          <a:ln/>
+        </p:spPr>
+        <p:txBody>
+          <a:bodyPr wrap="square" lIns="0" tIns="0" rIns="0" bIns="0" rtlCol="0" anchor="ctr"/>
+          <a:lstStyle/>
+          <a:p>
+            <a:pPr algn="r" indent="0" marL="0">
+              <a:buNone/>
+            </a:pPr>
+            <a:r>
+              <a:rPr lang="en-US" sz="1000" b="1" spc="120" kern="0" dirty="0">
+                <a:solidFill>
+                  <a:srgbClr val="8A6D14"/>
+                </a:solidFill>
+                <a:latin typeface="Arial" pitchFamily="34" charset="0"/>
+                <a:ea typeface="Arial" pitchFamily="34" charset="-122"/>
+                <a:cs typeface="Arial" pitchFamily="34" charset="-120"/>
+              </a:rPr>
+              <a:t>MORE BOOKINGS</a:t>
+            </a:r>
+            <a:endParaRPr lang="en-US" sz="1000" dirty="0"/>
+          </a:p>
+        </p:txBody>
+      </p:sp>
+      <p:sp>
+        <p:nvSpPr>
+          <p:cNvPr id="30" name="Shape 28"/>
+          <p:cNvSpPr/>
+          <p:nvPr/>
+        </p:nvSpPr>
+        <p:spPr>
+          <a:xfrm>
+            <a:off x="4864608" y="1848307"/>
+            <a:ext cx="1481328" cy="658368"/>
           </a:xfrm>
           <a:prstGeom prst="roundRect">
             <a:avLst>
-              <a:gd name="adj" fmla="val 9524"/>
+              <a:gd name="adj" fmla="val 6944"/>
             </a:avLst>
           </a:prstGeom>
           <a:solidFill>
@@ -4310,14 +4884,14 @@
       </p:sp>
       <p:sp>
         <p:nvSpPr>
-          <p:cNvPr id="13" name="Text 11"/>
-          <p:cNvSpPr/>
-          <p:nvPr/>
-        </p:nvSpPr>
-        <p:spPr>
-          <a:xfrm>
-            <a:off x="3858829" y="2501432"/>
-            <a:ext cx="1152144" cy="137160"/>
+          <p:cNvPr id="31" name="Text 29"/>
+          <p:cNvSpPr/>
+          <p:nvPr/>
+        </p:nvSpPr>
+        <p:spPr>
+          <a:xfrm>
+            <a:off x="4864608" y="1939747"/>
+            <a:ext cx="1481328" cy="164592"/>
           </a:xfrm>
           <a:prstGeom prst="rect">
             <a:avLst/>
@@ -4341,7 +4915,7 @@
                 <a:ea typeface="Arial" pitchFamily="34" charset="-122"/>
                 <a:cs typeface="Arial" pitchFamily="34" charset="-120"/>
               </a:rPr>
-              <a:t>CONVERSION</a:t>
+              <a:t>01 → 02  ·  CONVERSION</a:t>
             </a:r>
             <a:endParaRPr lang="en-US" sz="800" dirty="0"/>
           </a:p>
@@ -4349,14 +4923,14 @@
       </p:sp>
       <p:sp>
         <p:nvSpPr>
-          <p:cNvPr id="14" name="Text 12"/>
-          <p:cNvSpPr/>
-          <p:nvPr/>
-        </p:nvSpPr>
-        <p:spPr>
-          <a:xfrm>
-            <a:off x="3858829" y="2629448"/>
-            <a:ext cx="1152144" cy="182880"/>
+          <p:cNvPr id="32" name="Text 30"/>
+          <p:cNvSpPr/>
+          <p:nvPr/>
+        </p:nvSpPr>
+        <p:spPr>
+          <a:xfrm>
+            <a:off x="4864608" y="2122627"/>
+            <a:ext cx="1481328" cy="274320"/>
           </a:xfrm>
           <a:prstGeom prst="rect">
             <a:avLst/>
@@ -4372,7 +4946,7 @@
               <a:buNone/>
             </a:pPr>
             <a:r>
-              <a:rPr lang="en-US" sz="1500" b="1" dirty="0">
+              <a:rPr lang="en-US" sz="1700" b="1" dirty="0">
                 <a:solidFill>
                   <a:srgbClr val="5A6379"/>
                 </a:solidFill>
@@ -4382,24 +4956,24 @@
               </a:rPr>
               <a:t>___%</a:t>
             </a:r>
-            <a:endParaRPr lang="en-US" sz="1500" dirty="0"/>
-          </a:p>
-        </p:txBody>
-      </p:sp>
-      <p:sp>
-        <p:nvSpPr>
-          <p:cNvPr id="15" name="Shape 13"/>
-          <p:cNvSpPr/>
-          <p:nvPr/>
-        </p:nvSpPr>
-        <p:spPr>
-          <a:xfrm>
-            <a:off x="3858829" y="3649127"/>
-            <a:ext cx="1152144" cy="384048"/>
+            <a:endParaRPr lang="en-US" sz="1700" dirty="0"/>
+          </a:p>
+        </p:txBody>
+      </p:sp>
+      <p:sp>
+        <p:nvSpPr>
+          <p:cNvPr id="33" name="Shape 31"/>
+          <p:cNvSpPr/>
+          <p:nvPr/>
+        </p:nvSpPr>
+        <p:spPr>
+          <a:xfrm>
+            <a:off x="4864608" y="2652979"/>
+            <a:ext cx="1481328" cy="658368"/>
           </a:xfrm>
           <a:prstGeom prst="roundRect">
             <a:avLst>
-              <a:gd name="adj" fmla="val 9524"/>
+              <a:gd name="adj" fmla="val 6944"/>
             </a:avLst>
           </a:prstGeom>
           <a:solidFill>
@@ -4415,14 +4989,14 @@
       </p:sp>
       <p:sp>
         <p:nvSpPr>
-          <p:cNvPr id="16" name="Text 14"/>
-          <p:cNvSpPr/>
-          <p:nvPr/>
-        </p:nvSpPr>
-        <p:spPr>
-          <a:xfrm>
-            <a:off x="3858829" y="3690275"/>
-            <a:ext cx="1152144" cy="137160"/>
+          <p:cNvPr id="34" name="Text 32"/>
+          <p:cNvSpPr/>
+          <p:nvPr/>
+        </p:nvSpPr>
+        <p:spPr>
+          <a:xfrm>
+            <a:off x="4864608" y="2744419"/>
+            <a:ext cx="1481328" cy="164592"/>
           </a:xfrm>
           <a:prstGeom prst="rect">
             <a:avLst/>
@@ -4446,7 +5020,7 @@
                 <a:ea typeface="Arial" pitchFamily="34" charset="-122"/>
                 <a:cs typeface="Arial" pitchFamily="34" charset="-120"/>
               </a:rPr>
-              <a:t>CONVERSION</a:t>
+              <a:t>02 → 03  ·  CONVERSION</a:t>
             </a:r>
             <a:endParaRPr lang="en-US" sz="800" dirty="0"/>
           </a:p>
@@ -4454,14 +5028,14 @@
       </p:sp>
       <p:sp>
         <p:nvSpPr>
-          <p:cNvPr id="17" name="Text 15"/>
-          <p:cNvSpPr/>
-          <p:nvPr/>
-        </p:nvSpPr>
-        <p:spPr>
-          <a:xfrm>
-            <a:off x="3858829" y="3818291"/>
-            <a:ext cx="1152144" cy="182880"/>
+          <p:cNvPr id="35" name="Text 33"/>
+          <p:cNvSpPr/>
+          <p:nvPr/>
+        </p:nvSpPr>
+        <p:spPr>
+          <a:xfrm>
+            <a:off x="4864608" y="2927299"/>
+            <a:ext cx="1481328" cy="274320"/>
           </a:xfrm>
           <a:prstGeom prst="rect">
             <a:avLst/>
@@ -4477,7 +5051,7 @@
               <a:buNone/>
             </a:pPr>
             <a:r>
-              <a:rPr lang="en-US" sz="1500" b="1" dirty="0">
+              <a:rPr lang="en-US" sz="1700" b="1" dirty="0">
                 <a:solidFill>
                   <a:srgbClr val="5A6379"/>
                 </a:solidFill>
@@ -4487,24 +5061,24 @@
               </a:rPr>
               <a:t>___%</a:t>
             </a:r>
-            <a:endParaRPr lang="en-US" sz="1500" dirty="0"/>
-          </a:p>
-        </p:txBody>
-      </p:sp>
-      <p:sp>
-        <p:nvSpPr>
-          <p:cNvPr id="18" name="Shape 16"/>
-          <p:cNvSpPr/>
-          <p:nvPr/>
-        </p:nvSpPr>
-        <p:spPr>
-          <a:xfrm>
-            <a:off x="2669987" y="3649127"/>
-            <a:ext cx="1152144" cy="384048"/>
+            <a:endParaRPr lang="en-US" sz="1700" dirty="0"/>
+          </a:p>
+        </p:txBody>
+      </p:sp>
+      <p:sp>
+        <p:nvSpPr>
+          <p:cNvPr id="36" name="Shape 34"/>
+          <p:cNvSpPr/>
+          <p:nvPr/>
+        </p:nvSpPr>
+        <p:spPr>
+          <a:xfrm>
+            <a:off x="4864608" y="3457651"/>
+            <a:ext cx="1481328" cy="658368"/>
           </a:xfrm>
           <a:prstGeom prst="roundRect">
             <a:avLst>
-              <a:gd name="adj" fmla="val 9524"/>
+              <a:gd name="adj" fmla="val 6944"/>
             </a:avLst>
           </a:prstGeom>
           <a:solidFill>
@@ -4520,14 +5094,14 @@
       </p:sp>
       <p:sp>
         <p:nvSpPr>
-          <p:cNvPr id="19" name="Text 17"/>
-          <p:cNvSpPr/>
-          <p:nvPr/>
-        </p:nvSpPr>
-        <p:spPr>
-          <a:xfrm>
-            <a:off x="2669987" y="3690275"/>
-            <a:ext cx="1152144" cy="137160"/>
+          <p:cNvPr id="37" name="Text 35"/>
+          <p:cNvSpPr/>
+          <p:nvPr/>
+        </p:nvSpPr>
+        <p:spPr>
+          <a:xfrm>
+            <a:off x="4864608" y="3549091"/>
+            <a:ext cx="1481328" cy="164592"/>
           </a:xfrm>
           <a:prstGeom prst="rect">
             <a:avLst/>
@@ -4551,7 +5125,7 @@
                 <a:ea typeface="Arial" pitchFamily="34" charset="-122"/>
                 <a:cs typeface="Arial" pitchFamily="34" charset="-120"/>
               </a:rPr>
-              <a:t>CONVERSION</a:t>
+              <a:t>03 → 04  ·  CONVERSION</a:t>
             </a:r>
             <a:endParaRPr lang="en-US" sz="800" dirty="0"/>
           </a:p>
@@ -4559,14 +5133,14 @@
       </p:sp>
       <p:sp>
         <p:nvSpPr>
-          <p:cNvPr id="20" name="Text 18"/>
-          <p:cNvSpPr/>
-          <p:nvPr/>
-        </p:nvSpPr>
-        <p:spPr>
-          <a:xfrm>
-            <a:off x="2669987" y="3818291"/>
-            <a:ext cx="1152144" cy="182880"/>
+          <p:cNvPr id="38" name="Text 36"/>
+          <p:cNvSpPr/>
+          <p:nvPr/>
+        </p:nvSpPr>
+        <p:spPr>
+          <a:xfrm>
+            <a:off x="4864608" y="3731971"/>
+            <a:ext cx="1481328" cy="274320"/>
           </a:xfrm>
           <a:prstGeom prst="rect">
             <a:avLst/>
@@ -4582,7 +5156,7 @@
               <a:buNone/>
             </a:pPr>
             <a:r>
-              <a:rPr lang="en-US" sz="1500" b="1" dirty="0">
+              <a:rPr lang="en-US" sz="1700" b="1" dirty="0">
                 <a:solidFill>
                   <a:srgbClr val="5A6379"/>
                 </a:solidFill>
@@ -4592,24 +5166,24 @@
               </a:rPr>
               <a:t>___%</a:t>
             </a:r>
-            <a:endParaRPr lang="en-US" sz="1500" dirty="0"/>
-          </a:p>
-        </p:txBody>
-      </p:sp>
-      <p:sp>
-        <p:nvSpPr>
-          <p:cNvPr id="21" name="Shape 19"/>
-          <p:cNvSpPr/>
-          <p:nvPr/>
-        </p:nvSpPr>
-        <p:spPr>
-          <a:xfrm>
-            <a:off x="2669987" y="2460284"/>
-            <a:ext cx="1152144" cy="384048"/>
+            <a:endParaRPr lang="en-US" sz="1700" dirty="0"/>
+          </a:p>
+        </p:txBody>
+      </p:sp>
+      <p:sp>
+        <p:nvSpPr>
+          <p:cNvPr id="39" name="Shape 37"/>
+          <p:cNvSpPr/>
+          <p:nvPr/>
+        </p:nvSpPr>
+        <p:spPr>
+          <a:xfrm>
+            <a:off x="4864608" y="4262323"/>
+            <a:ext cx="1481328" cy="658368"/>
           </a:xfrm>
           <a:prstGeom prst="roundRect">
             <a:avLst>
-              <a:gd name="adj" fmla="val 9524"/>
+              <a:gd name="adj" fmla="val 6944"/>
             </a:avLst>
           </a:prstGeom>
           <a:solidFill>
@@ -4625,14 +5199,14 @@
       </p:sp>
       <p:sp>
         <p:nvSpPr>
-          <p:cNvPr id="22" name="Text 20"/>
-          <p:cNvSpPr/>
-          <p:nvPr/>
-        </p:nvSpPr>
-        <p:spPr>
-          <a:xfrm>
-            <a:off x="2669987" y="2501432"/>
-            <a:ext cx="1152144" cy="137160"/>
+          <p:cNvPr id="40" name="Text 38"/>
+          <p:cNvSpPr/>
+          <p:nvPr/>
+        </p:nvSpPr>
+        <p:spPr>
+          <a:xfrm>
+            <a:off x="4864608" y="4353763"/>
+            <a:ext cx="1481328" cy="164592"/>
           </a:xfrm>
           <a:prstGeom prst="rect">
             <a:avLst/>
@@ -4656,7 +5230,7 @@
                 <a:ea typeface="Arial" pitchFamily="34" charset="-122"/>
                 <a:cs typeface="Arial" pitchFamily="34" charset="-120"/>
               </a:rPr>
-              <a:t>CONVERSION</a:t>
+              <a:t>04 → 01  ·  CONVERSION</a:t>
             </a:r>
             <a:endParaRPr lang="en-US" sz="800" dirty="0"/>
           </a:p>
@@ -4664,14 +5238,14 @@
       </p:sp>
       <p:sp>
         <p:nvSpPr>
-          <p:cNvPr id="23" name="Text 21"/>
-          <p:cNvSpPr/>
-          <p:nvPr/>
-        </p:nvSpPr>
-        <p:spPr>
-          <a:xfrm>
-            <a:off x="2669987" y="2629448"/>
-            <a:ext cx="1152144" cy="182880"/>
+          <p:cNvPr id="41" name="Text 39"/>
+          <p:cNvSpPr/>
+          <p:nvPr/>
+        </p:nvSpPr>
+        <p:spPr>
+          <a:xfrm>
+            <a:off x="4864608" y="4536643"/>
+            <a:ext cx="1481328" cy="274320"/>
           </a:xfrm>
           <a:prstGeom prst="rect">
             <a:avLst/>
@@ -4687,7 +5261,7 @@
               <a:buNone/>
             </a:pPr>
             <a:r>
-              <a:rPr lang="en-US" sz="1500" b="1" dirty="0">
+              <a:rPr lang="en-US" sz="1700" b="1" dirty="0">
                 <a:solidFill>
                   <a:srgbClr val="5A6379"/>
                 </a:solidFill>
@@ -4697,507 +5271,13 @@
               </a:rPr>
               <a:t>___%</a:t>
             </a:r>
-            <a:endParaRPr lang="en-US" sz="1500" dirty="0"/>
-          </a:p>
-        </p:txBody>
-      </p:sp>
-      <p:sp>
-        <p:nvSpPr>
-          <p:cNvPr id="24" name="Shape 22"/>
-          <p:cNvSpPr/>
-          <p:nvPr/>
-        </p:nvSpPr>
-        <p:spPr>
-          <a:xfrm>
-            <a:off x="3352910" y="2759159"/>
-            <a:ext cx="975141" cy="975141"/>
-          </a:xfrm>
-          <a:prstGeom prst="ellipse">
-            <a:avLst/>
-          </a:prstGeom>
-          <a:solidFill>
-            <a:srgbClr val="1E808F"/>
-          </a:solidFill>
-          <a:ln/>
-        </p:spPr>
-      </p:sp>
-      <p:sp>
-        <p:nvSpPr>
-          <p:cNvPr id="25" name="Text 23"/>
-          <p:cNvSpPr/>
-          <p:nvPr/>
-        </p:nvSpPr>
-        <p:spPr>
-          <a:xfrm>
-            <a:off x="3398630" y="3081630"/>
-            <a:ext cx="883701" cy="330200"/>
-          </a:xfrm>
-          <a:prstGeom prst="rect">
-            <a:avLst/>
-          </a:prstGeom>
-          <a:noFill/>
-          <a:ln/>
-        </p:spPr>
-        <p:txBody>
-          <a:bodyPr wrap="square" lIns="0" tIns="0" rIns="0" bIns="0" rtlCol="0" anchor="ctr"/>
-          <a:lstStyle/>
-          <a:p>
-            <a:pPr algn="ctr" indent="0" marL="0">
-              <a:lnSpc>
-                <a:spcPct val="102000"/>
-              </a:lnSpc>
-              <a:buNone/>
-            </a:pPr>
-            <a:r>
-              <a:rPr lang="en-US" sz="1000" b="1" dirty="0">
-                <a:solidFill>
-                  <a:srgbClr val="FFFFFF"/>
-                </a:solidFill>
-                <a:latin typeface="Georgia" pitchFamily="34" charset="0"/>
-                <a:ea typeface="Georgia" pitchFamily="34" charset="-122"/>
-                <a:cs typeface="Georgia" pitchFamily="34" charset="-120"/>
-              </a:rPr>
-              <a:t>REVENUE</a:t>
-            </a:r>
-            <a:endParaRPr lang="en-US" sz="1000" dirty="0"/>
-          </a:p>
-          <a:p>
-            <a:pPr algn="ctr" indent="0" marL="0">
-              <a:lnSpc>
-                <a:spcPct val="102000"/>
-              </a:lnSpc>
-              <a:buNone/>
-            </a:pPr>
-            <a:r>
-              <a:rPr lang="en-US" sz="1000" b="1" dirty="0">
-                <a:solidFill>
-                  <a:srgbClr val="FFFFFF"/>
-                </a:solidFill>
-                <a:latin typeface="Georgia" pitchFamily="34" charset="0"/>
-                <a:ea typeface="Georgia" pitchFamily="34" charset="-122"/>
-                <a:cs typeface="Georgia" pitchFamily="34" charset="-120"/>
-              </a:rPr>
-              <a:t>GROWTH</a:t>
-            </a:r>
-            <a:endParaRPr lang="en-US" sz="1000" dirty="0"/>
-          </a:p>
-        </p:txBody>
-      </p:sp>
-      <p:sp>
-        <p:nvSpPr>
-          <p:cNvPr id="26" name="Shape 24"/>
-          <p:cNvSpPr/>
-          <p:nvPr/>
-        </p:nvSpPr>
-        <p:spPr>
-          <a:xfrm>
-            <a:off x="3575304" y="2140915"/>
-            <a:ext cx="530352" cy="530352"/>
-          </a:xfrm>
-          <a:prstGeom prst="ellipse">
-            <a:avLst/>
-          </a:prstGeom>
-          <a:solidFill>
-            <a:srgbClr val="F7F3EA"/>
-          </a:solidFill>
-          <a:ln w="12700">
-            <a:solidFill>
-              <a:srgbClr val="C9A227"/>
-            </a:solidFill>
-            <a:prstDash val="solid"/>
-          </a:ln>
-        </p:spPr>
-      </p:sp>
-      <p:sp>
-        <p:nvSpPr>
-          <p:cNvPr id="27" name="Text 25"/>
-          <p:cNvSpPr/>
-          <p:nvPr/>
-        </p:nvSpPr>
-        <p:spPr>
-          <a:xfrm>
-            <a:off x="3575304" y="2140915"/>
-            <a:ext cx="530352" cy="530352"/>
-          </a:xfrm>
-          <a:prstGeom prst="rect">
-            <a:avLst/>
-          </a:prstGeom>
-          <a:noFill/>
-          <a:ln/>
-        </p:spPr>
-        <p:txBody>
-          <a:bodyPr wrap="square" lIns="0" tIns="0" rIns="0" bIns="0" rtlCol="0" anchor="ctr"/>
-          <a:lstStyle/>
-          <a:p>
-            <a:pPr algn="ctr" indent="0" marL="0">
-              <a:buNone/>
-            </a:pPr>
-            <a:r>
-              <a:rPr lang="en-US" sz="1200" b="1" dirty="0">
-                <a:solidFill>
-                  <a:srgbClr val="8A6D14"/>
-                </a:solidFill>
-                <a:latin typeface="Georgia" pitchFamily="34" charset="0"/>
-                <a:ea typeface="Georgia" pitchFamily="34" charset="-122"/>
-                <a:cs typeface="Georgia" pitchFamily="34" charset="-120"/>
-              </a:rPr>
-              <a:t>01</a:t>
-            </a:r>
-            <a:endParaRPr lang="en-US" sz="1200" dirty="0"/>
-          </a:p>
-        </p:txBody>
-      </p:sp>
-      <p:sp>
-        <p:nvSpPr>
-          <p:cNvPr id="28" name="Text 26"/>
-          <p:cNvSpPr/>
-          <p:nvPr/>
-        </p:nvSpPr>
-        <p:spPr>
-          <a:xfrm>
-            <a:off x="3054096" y="1816303"/>
-            <a:ext cx="1572768" cy="251460"/>
-          </a:xfrm>
-          <a:prstGeom prst="rect">
-            <a:avLst/>
-          </a:prstGeom>
-          <a:noFill/>
-          <a:ln/>
-        </p:spPr>
-        <p:txBody>
-          <a:bodyPr wrap="square" lIns="0" tIns="0" rIns="0" bIns="0" rtlCol="0" anchor="ctr"/>
-          <a:lstStyle/>
-          <a:p>
-            <a:pPr algn="ctr" indent="0" marL="0">
-              <a:buNone/>
-            </a:pPr>
-            <a:r>
-              <a:rPr lang="en-US" sz="1000" b="1" spc="120" kern="0" dirty="0">
-                <a:solidFill>
-                  <a:srgbClr val="8A6D14"/>
-                </a:solidFill>
-                <a:latin typeface="Arial" pitchFamily="34" charset="0"/>
-                <a:ea typeface="Arial" pitchFamily="34" charset="-122"/>
-                <a:cs typeface="Arial" pitchFamily="34" charset="-120"/>
-              </a:rPr>
-              <a:t>MORE BOOKINGS</a:t>
-            </a:r>
-            <a:endParaRPr lang="en-US" sz="1000" dirty="0"/>
-          </a:p>
-        </p:txBody>
-      </p:sp>
-      <p:sp>
-        <p:nvSpPr>
-          <p:cNvPr id="29" name="Shape 27"/>
-          <p:cNvSpPr/>
-          <p:nvPr/>
-        </p:nvSpPr>
-        <p:spPr>
-          <a:xfrm>
-            <a:off x="4415942" y="2981554"/>
-            <a:ext cx="530352" cy="530352"/>
-          </a:xfrm>
-          <a:prstGeom prst="ellipse">
-            <a:avLst/>
-          </a:prstGeom>
-          <a:solidFill>
-            <a:srgbClr val="F7F3EA"/>
-          </a:solidFill>
-          <a:ln w="12700">
-            <a:solidFill>
-              <a:srgbClr val="C9A227"/>
-            </a:solidFill>
-            <a:prstDash val="solid"/>
-          </a:ln>
-        </p:spPr>
-      </p:sp>
-      <p:sp>
-        <p:nvSpPr>
-          <p:cNvPr id="30" name="Text 28"/>
-          <p:cNvSpPr/>
-          <p:nvPr/>
-        </p:nvSpPr>
-        <p:spPr>
-          <a:xfrm>
-            <a:off x="4415942" y="2981554"/>
-            <a:ext cx="530352" cy="530352"/>
-          </a:xfrm>
-          <a:prstGeom prst="rect">
-            <a:avLst/>
-          </a:prstGeom>
-          <a:noFill/>
-          <a:ln/>
-        </p:spPr>
-        <p:txBody>
-          <a:bodyPr wrap="square" lIns="0" tIns="0" rIns="0" bIns="0" rtlCol="0" anchor="ctr"/>
-          <a:lstStyle/>
-          <a:p>
-            <a:pPr algn="ctr" indent="0" marL="0">
-              <a:buNone/>
-            </a:pPr>
-            <a:r>
-              <a:rPr lang="en-US" sz="1200" b="1" dirty="0">
-                <a:solidFill>
-                  <a:srgbClr val="8A6D14"/>
-                </a:solidFill>
-                <a:latin typeface="Georgia" pitchFamily="34" charset="0"/>
-                <a:ea typeface="Georgia" pitchFamily="34" charset="-122"/>
-                <a:cs typeface="Georgia" pitchFamily="34" charset="-120"/>
-              </a:rPr>
-              <a:t>02</a:t>
-            </a:r>
-            <a:endParaRPr lang="en-US" sz="1200" dirty="0"/>
-          </a:p>
-        </p:txBody>
-      </p:sp>
-      <p:sp>
-        <p:nvSpPr>
-          <p:cNvPr id="31" name="Text 29"/>
-          <p:cNvSpPr/>
-          <p:nvPr/>
-        </p:nvSpPr>
-        <p:spPr>
-          <a:xfrm>
-            <a:off x="5074310" y="3121000"/>
-            <a:ext cx="1069848" cy="251460"/>
-          </a:xfrm>
-          <a:prstGeom prst="rect">
-            <a:avLst/>
-          </a:prstGeom>
-          <a:noFill/>
-          <a:ln/>
-        </p:spPr>
-        <p:txBody>
-          <a:bodyPr wrap="square" lIns="0" tIns="0" rIns="0" bIns="0" rtlCol="0" anchor="ctr"/>
-          <a:lstStyle/>
-          <a:p>
-            <a:pPr algn="l" indent="0" marL="0">
-              <a:buNone/>
-            </a:pPr>
-            <a:r>
-              <a:rPr lang="en-US" sz="1000" b="1" spc="120" kern="0" dirty="0">
-                <a:solidFill>
-                  <a:srgbClr val="8A6D14"/>
-                </a:solidFill>
-                <a:latin typeface="Arial" pitchFamily="34" charset="0"/>
-                <a:ea typeface="Arial" pitchFamily="34" charset="-122"/>
-                <a:cs typeface="Arial" pitchFamily="34" charset="-120"/>
-              </a:rPr>
-              <a:t>MORE DATA</a:t>
-            </a:r>
-            <a:endParaRPr lang="en-US" sz="1000" dirty="0"/>
-          </a:p>
-        </p:txBody>
-      </p:sp>
-      <p:sp>
-        <p:nvSpPr>
-          <p:cNvPr id="32" name="Shape 30"/>
-          <p:cNvSpPr/>
-          <p:nvPr/>
-        </p:nvSpPr>
-        <p:spPr>
-          <a:xfrm>
-            <a:off x="3575304" y="3822192"/>
-            <a:ext cx="530352" cy="530352"/>
-          </a:xfrm>
-          <a:prstGeom prst="ellipse">
-            <a:avLst/>
-          </a:prstGeom>
-          <a:solidFill>
-            <a:srgbClr val="F7F3EA"/>
-          </a:solidFill>
-          <a:ln w="12700">
-            <a:solidFill>
-              <a:srgbClr val="C9A227"/>
-            </a:solidFill>
-            <a:prstDash val="solid"/>
-          </a:ln>
-        </p:spPr>
-      </p:sp>
-      <p:sp>
-        <p:nvSpPr>
-          <p:cNvPr id="33" name="Text 31"/>
-          <p:cNvSpPr/>
-          <p:nvPr/>
-        </p:nvSpPr>
-        <p:spPr>
-          <a:xfrm>
-            <a:off x="3575304" y="3822192"/>
-            <a:ext cx="530352" cy="530352"/>
-          </a:xfrm>
-          <a:prstGeom prst="rect">
-            <a:avLst/>
-          </a:prstGeom>
-          <a:noFill/>
-          <a:ln/>
-        </p:spPr>
-        <p:txBody>
-          <a:bodyPr wrap="square" lIns="0" tIns="0" rIns="0" bIns="0" rtlCol="0" anchor="ctr"/>
-          <a:lstStyle/>
-          <a:p>
-            <a:pPr algn="ctr" indent="0" marL="0">
-              <a:buNone/>
-            </a:pPr>
-            <a:r>
-              <a:rPr lang="en-US" sz="1200" b="1" dirty="0">
-                <a:solidFill>
-                  <a:srgbClr val="8A6D14"/>
-                </a:solidFill>
-                <a:latin typeface="Georgia" pitchFamily="34" charset="0"/>
-                <a:ea typeface="Georgia" pitchFamily="34" charset="-122"/>
-                <a:cs typeface="Georgia" pitchFamily="34" charset="-120"/>
-              </a:rPr>
-              <a:t>03</a:t>
-            </a:r>
-            <a:endParaRPr lang="en-US" sz="1200" dirty="0"/>
-          </a:p>
-        </p:txBody>
-      </p:sp>
-      <p:sp>
-        <p:nvSpPr>
-          <p:cNvPr id="34" name="Text 32"/>
-          <p:cNvSpPr/>
-          <p:nvPr/>
-        </p:nvSpPr>
-        <p:spPr>
-          <a:xfrm>
-            <a:off x="3054096" y="4425696"/>
-            <a:ext cx="1572768" cy="251460"/>
-          </a:xfrm>
-          <a:prstGeom prst="rect">
-            <a:avLst/>
-          </a:prstGeom>
-          <a:noFill/>
-          <a:ln/>
-        </p:spPr>
-        <p:txBody>
-          <a:bodyPr wrap="square" lIns="0" tIns="0" rIns="0" bIns="0" rtlCol="0" anchor="ctr"/>
-          <a:lstStyle/>
-          <a:p>
-            <a:pPr algn="ctr" indent="0" marL="0">
-              <a:buNone/>
-            </a:pPr>
-            <a:r>
-              <a:rPr lang="en-US" sz="1000" b="1" spc="120" kern="0" dirty="0">
-                <a:solidFill>
-                  <a:srgbClr val="8A6D14"/>
-                </a:solidFill>
-                <a:latin typeface="Arial" pitchFamily="34" charset="0"/>
-                <a:ea typeface="Arial" pitchFamily="34" charset="-122"/>
-                <a:cs typeface="Arial" pitchFamily="34" charset="-120"/>
-              </a:rPr>
-              <a:t>MORE PERSONAL</a:t>
-            </a:r>
-            <a:endParaRPr lang="en-US" sz="1000" dirty="0"/>
-          </a:p>
-        </p:txBody>
-      </p:sp>
-      <p:sp>
-        <p:nvSpPr>
-          <p:cNvPr id="35" name="Shape 33"/>
-          <p:cNvSpPr/>
-          <p:nvPr/>
-        </p:nvSpPr>
-        <p:spPr>
-          <a:xfrm>
-            <a:off x="2734666" y="2981554"/>
-            <a:ext cx="530352" cy="530352"/>
-          </a:xfrm>
-          <a:prstGeom prst="ellipse">
-            <a:avLst/>
-          </a:prstGeom>
-          <a:solidFill>
-            <a:srgbClr val="F7F3EA"/>
-          </a:solidFill>
-          <a:ln w="12700">
-            <a:solidFill>
-              <a:srgbClr val="C9A227"/>
-            </a:solidFill>
-            <a:prstDash val="solid"/>
-          </a:ln>
-        </p:spPr>
-      </p:sp>
-      <p:sp>
-        <p:nvSpPr>
-          <p:cNvPr id="36" name="Text 34"/>
-          <p:cNvSpPr/>
-          <p:nvPr/>
-        </p:nvSpPr>
-        <p:spPr>
-          <a:xfrm>
-            <a:off x="2734666" y="2981554"/>
-            <a:ext cx="530352" cy="530352"/>
-          </a:xfrm>
-          <a:prstGeom prst="rect">
-            <a:avLst/>
-          </a:prstGeom>
-          <a:noFill/>
-          <a:ln/>
-        </p:spPr>
-        <p:txBody>
-          <a:bodyPr wrap="square" lIns="0" tIns="0" rIns="0" bIns="0" rtlCol="0" anchor="ctr"/>
-          <a:lstStyle/>
-          <a:p>
-            <a:pPr algn="ctr" indent="0" marL="0">
-              <a:buNone/>
-            </a:pPr>
-            <a:r>
-              <a:rPr lang="en-US" sz="1200" b="1" dirty="0">
-                <a:solidFill>
-                  <a:srgbClr val="8A6D14"/>
-                </a:solidFill>
-                <a:latin typeface="Georgia" pitchFamily="34" charset="0"/>
-                <a:ea typeface="Georgia" pitchFamily="34" charset="-122"/>
-                <a:cs typeface="Georgia" pitchFamily="34" charset="-120"/>
-              </a:rPr>
-              <a:t>04</a:t>
-            </a:r>
-            <a:endParaRPr lang="en-US" sz="1200" dirty="0"/>
-          </a:p>
-        </p:txBody>
-      </p:sp>
-      <p:sp>
-        <p:nvSpPr>
-          <p:cNvPr id="37" name="Text 35"/>
-          <p:cNvSpPr/>
-          <p:nvPr/>
-        </p:nvSpPr>
-        <p:spPr>
-          <a:xfrm>
-            <a:off x="1110082" y="3121000"/>
-            <a:ext cx="1496568" cy="251460"/>
-          </a:xfrm>
-          <a:prstGeom prst="rect">
-            <a:avLst/>
-          </a:prstGeom>
-          <a:noFill/>
-          <a:ln/>
-        </p:spPr>
-        <p:txBody>
-          <a:bodyPr wrap="square" lIns="0" tIns="0" rIns="0" bIns="0" rtlCol="0" anchor="ctr"/>
-          <a:lstStyle/>
-          <a:p>
-            <a:pPr algn="r" indent="0" marL="0">
-              <a:buNone/>
-            </a:pPr>
-            <a:r>
-              <a:rPr lang="en-US" sz="1000" b="1" spc="120" kern="0" dirty="0">
-                <a:solidFill>
-                  <a:srgbClr val="8A6D14"/>
-                </a:solidFill>
-                <a:latin typeface="Arial" pitchFamily="34" charset="0"/>
-                <a:ea typeface="Arial" pitchFamily="34" charset="-122"/>
-                <a:cs typeface="Arial" pitchFamily="34" charset="-120"/>
-              </a:rPr>
-              <a:t>MORE BOOKINGS</a:t>
-            </a:r>
-            <a:endParaRPr lang="en-US" sz="1000" dirty="0"/>
-          </a:p>
-        </p:txBody>
-      </p:sp>
-      <p:sp>
-        <p:nvSpPr>
-          <p:cNvPr id="38" name="Text 36"/>
+            <a:endParaRPr lang="en-US" sz="1700" dirty="0"/>
+          </a:p>
+        </p:txBody>
+      </p:sp>
+      <p:sp>
+        <p:nvSpPr>
+          <p:cNvPr id="42" name="Text 40"/>
           <p:cNvSpPr/>
           <p:nvPr/>
         </p:nvSpPr>
@@ -5236,7 +5316,7 @@
       </p:sp>
       <p:sp>
         <p:nvSpPr>
-          <p:cNvPr id="39" name="Shape 37"/>
+          <p:cNvPr id="43" name="Shape 41"/>
           <p:cNvSpPr/>
           <p:nvPr/>
         </p:nvSpPr>
@@ -5261,7 +5341,7 @@
       </p:sp>
       <p:sp>
         <p:nvSpPr>
-          <p:cNvPr id="40" name="Text 38"/>
+          <p:cNvPr id="44" name="Text 42"/>
           <p:cNvSpPr/>
           <p:nvPr/>
         </p:nvSpPr>
@@ -5320,7 +5400,7 @@
       </p:sp>
       <p:sp>
         <p:nvSpPr>
-          <p:cNvPr id="41" name="Shape 39"/>
+          <p:cNvPr id="45" name="Shape 43"/>
           <p:cNvSpPr/>
           <p:nvPr/>
         </p:nvSpPr>
@@ -5345,7 +5425,7 @@
       </p:sp>
       <p:sp>
         <p:nvSpPr>
-          <p:cNvPr id="42" name="Text 40"/>
+          <p:cNvPr id="46" name="Text 44"/>
           <p:cNvSpPr/>
           <p:nvPr/>
         </p:nvSpPr>
@@ -5404,7 +5484,7 @@
       </p:sp>
       <p:sp>
         <p:nvSpPr>
-          <p:cNvPr id="43" name="Shape 41"/>
+          <p:cNvPr id="47" name="Shape 45"/>
           <p:cNvSpPr/>
           <p:nvPr/>
         </p:nvSpPr>
@@ -5429,7 +5509,7 @@
       </p:sp>
       <p:sp>
         <p:nvSpPr>
-          <p:cNvPr id="44" name="Text 42"/>
+          <p:cNvPr id="48" name="Text 46"/>
           <p:cNvSpPr/>
           <p:nvPr/>
         </p:nvSpPr>
@@ -5488,7 +5568,7 @@
       </p:sp>
       <p:sp>
         <p:nvSpPr>
-          <p:cNvPr id="45" name="Shape 43"/>
+          <p:cNvPr id="49" name="Shape 47"/>
           <p:cNvSpPr/>
           <p:nvPr/>
         </p:nvSpPr>
@@ -5513,7 +5593,7 @@
       </p:sp>
       <p:sp>
         <p:nvSpPr>
-          <p:cNvPr id="46" name="Text 44"/>
+          <p:cNvPr id="50" name="Text 48"/>
           <p:cNvSpPr/>
           <p:nvPr/>
         </p:nvSpPr>
@@ -5572,13 +5652,13 @@
       </p:sp>
       <p:sp>
         <p:nvSpPr>
-          <p:cNvPr id="47" name="Text 45"/>
-          <p:cNvSpPr/>
-          <p:nvPr/>
-        </p:nvSpPr>
-        <p:spPr>
-          <a:xfrm>
-            <a:off x="813816" y="4882896"/>
+          <p:cNvPr id="51" name="Text 49"/>
+          <p:cNvSpPr/>
+          <p:nvPr/>
+        </p:nvSpPr>
+        <p:spPr>
+          <a:xfrm>
+            <a:off x="813816" y="4992624"/>
             <a:ext cx="6035040" cy="274320"/>
           </a:xfrm>
           <a:prstGeom prst="rect">
@@ -5611,14 +5691,14 @@
       </p:sp>
       <p:sp>
         <p:nvSpPr>
-          <p:cNvPr id="48" name="Text 46"/>
-          <p:cNvSpPr/>
-          <p:nvPr/>
-        </p:nvSpPr>
-        <p:spPr>
-          <a:xfrm>
-            <a:off x="813816" y="5266944"/>
-            <a:ext cx="10570464" cy="507492"/>
+          <p:cNvPr id="52" name="Text 50"/>
+          <p:cNvSpPr/>
+          <p:nvPr/>
+        </p:nvSpPr>
+        <p:spPr>
+          <a:xfrm>
+            <a:off x="813816" y="5358384"/>
+            <a:ext cx="10570464" cy="283464"/>
           </a:xfrm>
           <a:prstGeom prst="rect">
             <a:avLst/>
@@ -5637,7 +5717,7 @@
               <a:buNone/>
             </a:pPr>
             <a:r>
-              <a:rPr lang="en-US" sz="1300" i="1" dirty="0">
+              <a:rPr lang="en-US" sz="1200" i="1" dirty="0">
                 <a:solidFill>
                   <a:srgbClr val="5A6379"/>
                 </a:solidFill>
@@ -5645,9 +5725,9 @@
                 <a:ea typeface="Arial" pitchFamily="34" charset="-122"/>
                 <a:cs typeface="Arial" pitchFamily="34" charset="-120"/>
               </a:rPr>
-              <a:t>Starting from what is broken means guessing which of many fixes to try. Starting from what is working leaves one or two obvious moves.</a:t>
-            </a:r>
-            <a:endParaRPr lang="en-US" sz="1300" dirty="0"/>
+              <a:t>Starting from a loss means guessing among many fixes. Starting from a win leaves one or two obvious moves.</a:t>
+            </a:r>
+            <a:endParaRPr lang="en-US" sz="1200" dirty="0"/>
           </a:p>
         </p:txBody>
       </p:sp>
@@ -6317,7 +6397,7 @@
         </p:nvSpPr>
         <p:spPr>
           <a:xfrm>
-            <a:off x="813816" y="4517136"/>
+            <a:off x="813816" y="4937760"/>
             <a:ext cx="10570464" cy="299466"/>
           </a:xfrm>
           <a:prstGeom prst="rect">
@@ -11836,8 +11916,8 @@
         </p:nvSpPr>
         <p:spPr>
           <a:xfrm>
-            <a:off x="2670048" y="4718304"/>
-            <a:ext cx="1572768" cy="251460"/>
+            <a:off x="2388108" y="4718304"/>
+            <a:ext cx="2136648" cy="251460"/>
           </a:xfrm>
           <a:prstGeom prst="rect">
             <a:avLst/>
@@ -11861,7 +11941,7 @@
                 <a:ea typeface="Arial" pitchFamily="34" charset="-122"/>
                 <a:cs typeface="Arial" pitchFamily="34" charset="-120"/>
               </a:rPr>
-              <a:t>MORE PERSONAL</a:t>
+              <a:t>MORE PERSONAL TRIPS</a:t>
             </a:r>
             <a:endParaRPr lang="en-US" sz="1000" dirty="0"/>
           </a:p>
@@ -13684,7 +13764,7 @@
         </p:nvSpPr>
         <p:spPr>
           <a:xfrm>
-            <a:off x="813816" y="3218688"/>
+            <a:off x="813816" y="2962656"/>
             <a:ext cx="10570464" cy="0"/>
           </a:xfrm>
           <a:prstGeom prst="line">
@@ -13709,7 +13789,7 @@
         </p:nvSpPr>
         <p:spPr>
           <a:xfrm>
-            <a:off x="1793138" y="3140964"/>
+            <a:off x="1793138" y="2884932"/>
             <a:ext cx="155448" cy="155448"/>
           </a:xfrm>
           <a:prstGeom prst="ellipse">
@@ -13729,7 +13809,7 @@
         </p:nvSpPr>
         <p:spPr>
           <a:xfrm>
-            <a:off x="819302" y="2532888"/>
+            <a:off x="819302" y="2276856"/>
             <a:ext cx="2103120" cy="201168"/>
           </a:xfrm>
           <a:prstGeom prst="rect">
@@ -13768,7 +13848,7 @@
         </p:nvSpPr>
         <p:spPr>
           <a:xfrm>
-            <a:off x="819302" y="2734056"/>
+            <a:off x="819302" y="2478024"/>
             <a:ext cx="2103120" cy="443484"/>
           </a:xfrm>
           <a:prstGeom prst="rect">
@@ -13810,7 +13890,7 @@
         </p:nvSpPr>
         <p:spPr>
           <a:xfrm>
-            <a:off x="3907231" y="3140964"/>
+            <a:off x="3907231" y="2884932"/>
             <a:ext cx="155448" cy="155448"/>
           </a:xfrm>
           <a:prstGeom prst="ellipse">
@@ -13830,7 +13910,7 @@
         </p:nvSpPr>
         <p:spPr>
           <a:xfrm>
-            <a:off x="2933395" y="3410712"/>
+            <a:off x="2933395" y="3154680"/>
             <a:ext cx="2103120" cy="201168"/>
           </a:xfrm>
           <a:prstGeom prst="rect">
@@ -13869,7 +13949,7 @@
         </p:nvSpPr>
         <p:spPr>
           <a:xfrm>
-            <a:off x="2933395" y="3611880"/>
+            <a:off x="2933395" y="3355848"/>
             <a:ext cx="2103120" cy="443484"/>
           </a:xfrm>
           <a:prstGeom prst="rect">
@@ -13911,7 +13991,7 @@
         </p:nvSpPr>
         <p:spPr>
           <a:xfrm>
-            <a:off x="6021324" y="3140964"/>
+            <a:off x="6021324" y="2884932"/>
             <a:ext cx="155448" cy="155448"/>
           </a:xfrm>
           <a:prstGeom prst="ellipse">
@@ -13931,7 +14011,7 @@
         </p:nvSpPr>
         <p:spPr>
           <a:xfrm>
-            <a:off x="5047488" y="2532888"/>
+            <a:off x="5047488" y="2276856"/>
             <a:ext cx="2103120" cy="201168"/>
           </a:xfrm>
           <a:prstGeom prst="rect">
@@ -13970,7 +14050,7 @@
         </p:nvSpPr>
         <p:spPr>
           <a:xfrm>
-            <a:off x="5047488" y="2734056"/>
+            <a:off x="5047488" y="2478024"/>
             <a:ext cx="2103120" cy="443484"/>
           </a:xfrm>
           <a:prstGeom prst="rect">
@@ -14012,7 +14092,7 @@
         </p:nvSpPr>
         <p:spPr>
           <a:xfrm>
-            <a:off x="8135417" y="3140964"/>
+            <a:off x="8135417" y="2884932"/>
             <a:ext cx="155448" cy="155448"/>
           </a:xfrm>
           <a:prstGeom prst="ellipse">
@@ -14032,7 +14112,7 @@
         </p:nvSpPr>
         <p:spPr>
           <a:xfrm>
-            <a:off x="7161581" y="3410712"/>
+            <a:off x="7161581" y="3154680"/>
             <a:ext cx="2103120" cy="201168"/>
           </a:xfrm>
           <a:prstGeom prst="rect">
@@ -14071,7 +14151,7 @@
         </p:nvSpPr>
         <p:spPr>
           <a:xfrm>
-            <a:off x="7161581" y="3611880"/>
+            <a:off x="7161581" y="3355848"/>
             <a:ext cx="2103120" cy="443484"/>
           </a:xfrm>
           <a:prstGeom prst="rect">
@@ -14113,7 +14193,7 @@
         </p:nvSpPr>
         <p:spPr>
           <a:xfrm>
-            <a:off x="10249510" y="3140964"/>
+            <a:off x="10249510" y="2884932"/>
             <a:ext cx="155448" cy="155448"/>
           </a:xfrm>
           <a:prstGeom prst="ellipse">
@@ -14133,7 +14213,7 @@
         </p:nvSpPr>
         <p:spPr>
           <a:xfrm>
-            <a:off x="9275674" y="2532888"/>
+            <a:off x="9275674" y="2276856"/>
             <a:ext cx="2103120" cy="201168"/>
           </a:xfrm>
           <a:prstGeom prst="rect">
@@ -14172,7 +14252,7 @@
         </p:nvSpPr>
         <p:spPr>
           <a:xfrm>
-            <a:off x="9275674" y="2734056"/>
+            <a:off x="9275674" y="2478024"/>
             <a:ext cx="2103120" cy="443484"/>
           </a:xfrm>
           <a:prstGeom prst="rect">
@@ -14214,7 +14294,7 @@
         </p:nvSpPr>
         <p:spPr>
           <a:xfrm>
-            <a:off x="1870862" y="4069080"/>
+            <a:off x="1870862" y="3813048"/>
             <a:ext cx="6342278" cy="402336"/>
           </a:xfrm>
           <a:prstGeom prst="roundRect">
@@ -14236,7 +14316,7 @@
         </p:nvSpPr>
         <p:spPr>
           <a:xfrm>
-            <a:off x="1870862" y="4069080"/>
+            <a:off x="1870862" y="3813048"/>
             <a:ext cx="6342278" cy="402336"/>
           </a:xfrm>
           <a:prstGeom prst="rect">
@@ -14649,8 +14729,8 @@
         </p:nvSpPr>
         <p:spPr>
           <a:xfrm>
-            <a:off x="2163928" y="3163824"/>
-            <a:ext cx="7863840" cy="2356866"/>
+            <a:off x="2163928" y="3314761"/>
+            <a:ext cx="7863840" cy="2228850"/>
           </a:xfrm>
           <a:prstGeom prst="rect">
             <a:avLst/>
@@ -14669,8 +14749,8 @@
         </p:nvSpPr>
         <p:spPr>
           <a:xfrm>
-            <a:off x="2401672" y="3401568"/>
-            <a:ext cx="7388352" cy="299466"/>
+            <a:off x="2365096" y="3515929"/>
+            <a:ext cx="7461504" cy="299466"/>
           </a:xfrm>
           <a:prstGeom prst="rect">
             <a:avLst/>
@@ -14708,7 +14788,7 @@
         </p:nvSpPr>
         <p:spPr>
           <a:xfrm rot="2700000">
-            <a:off x="2401672" y="3888486"/>
+            <a:off x="2365096" y="4002847"/>
             <a:ext cx="100584" cy="100584"/>
           </a:xfrm>
           <a:prstGeom prst="rect">
@@ -14733,8 +14813,8 @@
         </p:nvSpPr>
         <p:spPr>
           <a:xfrm>
-            <a:off x="2712568" y="3810762"/>
-            <a:ext cx="7077456" cy="299466"/>
+            <a:off x="2675992" y="3925123"/>
+            <a:ext cx="7150608" cy="299466"/>
           </a:xfrm>
           <a:prstGeom prst="rect">
             <a:avLst/>
@@ -14775,7 +14855,7 @@
         </p:nvSpPr>
         <p:spPr>
           <a:xfrm rot="2700000">
-            <a:off x="2401672" y="4279392"/>
+            <a:off x="2365096" y="4375465"/>
             <a:ext cx="100584" cy="100584"/>
           </a:xfrm>
           <a:prstGeom prst="rect">
@@ -14800,8 +14880,8 @@
         </p:nvSpPr>
         <p:spPr>
           <a:xfrm>
-            <a:off x="2712568" y="4201668"/>
-            <a:ext cx="7077456" cy="299466"/>
+            <a:off x="2675992" y="4297741"/>
+            <a:ext cx="7150608" cy="299466"/>
           </a:xfrm>
           <a:prstGeom prst="rect">
             <a:avLst/>
@@ -14842,7 +14922,7 @@
         </p:nvSpPr>
         <p:spPr>
           <a:xfrm rot="2700000">
-            <a:off x="2401672" y="4670298"/>
+            <a:off x="2365096" y="4748083"/>
             <a:ext cx="100584" cy="100584"/>
           </a:xfrm>
           <a:prstGeom prst="rect">
@@ -14867,8 +14947,8 @@
         </p:nvSpPr>
         <p:spPr>
           <a:xfrm>
-            <a:off x="2712568" y="4592574"/>
-            <a:ext cx="7077456" cy="299466"/>
+            <a:off x="2675992" y="4670359"/>
+            <a:ext cx="7150608" cy="299466"/>
           </a:xfrm>
           <a:prstGeom prst="rect">
             <a:avLst/>
@@ -14895,7 +14975,7 @@
                 <a:ea typeface="Arial" pitchFamily="34" charset="-122"/>
                 <a:cs typeface="Arial" pitchFamily="34" charset="-120"/>
               </a:rPr>
-              <a:t>Your workspace invite accepted. Check your email now if you are unsure.</a:t>
+              <a:t>Your workspace invite accepted.</a:t>
             </a:r>
             <a:endParaRPr lang="en-US" sz="1300" dirty="0"/>
           </a:p>
@@ -14909,7 +14989,7 @@
         </p:nvSpPr>
         <p:spPr>
           <a:xfrm rot="2700000">
-            <a:off x="2401672" y="5061204"/>
+            <a:off x="2365096" y="5120701"/>
             <a:ext cx="100584" cy="100584"/>
           </a:xfrm>
           <a:prstGeom prst="rect">
@@ -14934,8 +15014,8 @@
         </p:nvSpPr>
         <p:spPr>
           <a:xfrm>
-            <a:off x="2712568" y="4983480"/>
-            <a:ext cx="7077456" cy="299466"/>
+            <a:off x="2675992" y="5042977"/>
+            <a:ext cx="7150608" cy="299466"/>
           </a:xfrm>
           <a:prstGeom prst="rect">
             <a:avLst/>
@@ -15402,8 +15482,8 @@
         </p:nvSpPr>
         <p:spPr>
           <a:xfrm>
-            <a:off x="1706728" y="5333512"/>
-            <a:ext cx="8778240" cy="507492"/>
+            <a:off x="1066648" y="5212080"/>
+            <a:ext cx="10058400" cy="299466"/>
           </a:xfrm>
           <a:prstGeom prst="rect">
             <a:avLst/>
@@ -15430,7 +15510,7 @@
                 <a:ea typeface="Arial" pitchFamily="34" charset="-122"/>
                 <a:cs typeface="Arial" pitchFamily="34" charset="-120"/>
               </a:rPr>
-              <a:t>The art of a data strategy is not collecting more data. It is choosing which decisions we support first, and staying relentless about whether those decisions move revenue.</a:t>
+              <a:t>The art of a data strategy is choosing which decisions we support first, and whether they move revenue.</a:t>
             </a:r>
             <a:endParaRPr lang="en-US" sz="1300" dirty="0"/>
           </a:p>
@@ -17675,7 +17755,7 @@
                 <a:ea typeface="Arial" pitchFamily="34" charset="-122"/>
                 <a:cs typeface="Arial" pitchFamily="34" charset="-120"/>
               </a:rPr>
-              <a:t>SIGNATURE'S EXECUTIVE DATA STRATEGY · THE STRATEGY FLYWHEEL</a:t>
+              <a:t>SIGNATURE'S EXECUTIVE DATA STRATEGY</a:t>
             </a:r>
             <a:endParaRPr lang="en-US" sz="1200" dirty="0"/>
           </a:p>
@@ -18185,8 +18265,8 @@
         </p:nvSpPr>
         <p:spPr>
           <a:xfrm>
-            <a:off x="3145536" y="4590288"/>
-            <a:ext cx="1572768" cy="251460"/>
+            <a:off x="2863596" y="4590288"/>
+            <a:ext cx="2136648" cy="251460"/>
           </a:xfrm>
           <a:prstGeom prst="rect">
             <a:avLst/>
@@ -18210,7 +18290,7 @@
                 <a:ea typeface="Arial" pitchFamily="34" charset="-122"/>
                 <a:cs typeface="Arial" pitchFamily="34" charset="-120"/>
               </a:rPr>
-              <a:t>MORE PERSONAL</a:t>
+              <a:t>MORE PERSONAL TRIPS</a:t>
             </a:r>
             <a:endParaRPr lang="en-US" sz="1000" dirty="0"/>
           </a:p>
@@ -18556,7 +18636,7 @@
                 <a:ea typeface="Arial" pitchFamily="34" charset="-122"/>
                 <a:cs typeface="Arial" pitchFamily="34" charset="-120"/>
               </a:rPr>
-              <a:t>MORE PERSONAL</a:t>
+              <a:t>MORE PERSONAL TRIPS</a:t>
             </a:r>
             <a:endParaRPr lang="en-US" sz="1300" dirty="0"/>
           </a:p>
@@ -20988,7 +21068,7 @@
         <p:spPr>
           <a:xfrm>
             <a:off x="813816" y="4846320"/>
-            <a:ext cx="10570464" cy="507492"/>
+            <a:ext cx="10570464" cy="299466"/>
           </a:xfrm>
           <a:prstGeom prst="rect">
             <a:avLst/>
@@ -21015,7 +21095,7 @@
                 <a:ea typeface="Arial" pitchFamily="34" charset="-122"/>
                 <a:cs typeface="Arial" pitchFamily="34" charset="-120"/>
               </a:rPr>
-              <a:t>The strategy is agreed. What we build now is the weekly rhythm that makes the flywheel turn, and the shared awareness that keeps it turning.</a:t>
+              <a:t>The strategy is agreed. Now we build the weekly rhythm that makes the flywheel turn.</a:t>
             </a:r>
             <a:endParaRPr lang="en-US" sz="1300" dirty="0"/>
           </a:p>

--- a/decks/sigcompass-reveal.pptx
+++ b/decks/sigcompass-reveal.pptx
@@ -8469,7 +8469,46 @@
       </p:sp>
       <p:sp>
         <p:nvSpPr>
-          <p:cNvPr id="8" name="Shape 6"/>
+          <p:cNvPr id="8" name="Text 6"/>
+          <p:cNvSpPr/>
+          <p:nvPr/>
+        </p:nvSpPr>
+        <p:spPr>
+          <a:xfrm>
+            <a:off x="10652760" y="5943600"/>
+            <a:ext cx="731520" cy="182880"/>
+          </a:xfrm>
+          <a:prstGeom prst="rect">
+            <a:avLst/>
+          </a:prstGeom>
+          <a:noFill/>
+          <a:ln/>
+        </p:spPr>
+        <p:txBody>
+          <a:bodyPr wrap="square" lIns="0" tIns="0" rIns="0" bIns="0" rtlCol="0" anchor="ctr"/>
+          <a:lstStyle/>
+          <a:p>
+            <a:pPr algn="r" indent="0" marL="0">
+              <a:buNone/>
+            </a:pPr>
+            <a:r>
+              <a:rPr lang="en-US" sz="900" spc="120" kern="0" dirty="0">
+                <a:solidFill>
+                  <a:srgbClr val="AFA893"/>
+                </a:solidFill>
+                <a:latin typeface="Arial" pitchFamily="34" charset="0"/>
+                <a:ea typeface="Arial" pitchFamily="34" charset="-122"/>
+                <a:cs typeface="Arial" pitchFamily="34" charset="-120"/>
+              </a:rPr>
+              <a:t>15</a:t>
+            </a:r>
+            <a:endParaRPr lang="en-US" sz="900" dirty="0"/>
+          </a:p>
+        </p:txBody>
+      </p:sp>
+      <p:sp>
+        <p:nvSpPr>
+          <p:cNvPr id="9" name="Shape 7"/>
           <p:cNvSpPr/>
           <p:nvPr/>
         </p:nvSpPr>
@@ -8494,7 +8533,7 @@
       </p:sp>
       <p:sp>
         <p:nvSpPr>
-          <p:cNvPr id="9" name="Text 7"/>
+          <p:cNvPr id="10" name="Text 8"/>
           <p:cNvSpPr/>
           <p:nvPr/>
         </p:nvSpPr>
@@ -8533,7 +8572,7 @@
       </p:sp>
       <p:sp>
         <p:nvSpPr>
-          <p:cNvPr id="10" name="Text 8"/>
+          <p:cNvPr id="11" name="Text 9"/>
           <p:cNvSpPr/>
           <p:nvPr/>
         </p:nvSpPr>
@@ -8572,7 +8611,7 @@
       </p:sp>
       <p:sp>
         <p:nvSpPr>
-          <p:cNvPr id="11" name="Text 9"/>
+          <p:cNvPr id="12" name="Text 10"/>
           <p:cNvSpPr/>
           <p:nvPr/>
         </p:nvSpPr>
@@ -20116,7 +20155,46 @@
       </p:sp>
       <p:sp>
         <p:nvSpPr>
-          <p:cNvPr id="8" name="Shape 6"/>
+          <p:cNvPr id="8" name="Text 6"/>
+          <p:cNvSpPr/>
+          <p:nvPr/>
+        </p:nvSpPr>
+        <p:spPr>
+          <a:xfrm>
+            <a:off x="10652760" y="5943600"/>
+            <a:ext cx="731520" cy="182880"/>
+          </a:xfrm>
+          <a:prstGeom prst="rect">
+            <a:avLst/>
+          </a:prstGeom>
+          <a:noFill/>
+          <a:ln/>
+        </p:spPr>
+        <p:txBody>
+          <a:bodyPr wrap="square" lIns="0" tIns="0" rIns="0" bIns="0" rtlCol="0" anchor="ctr"/>
+          <a:lstStyle/>
+          <a:p>
+            <a:pPr algn="r" indent="0" marL="0">
+              <a:buNone/>
+            </a:pPr>
+            <a:r>
+              <a:rPr lang="en-US" sz="900" spc="120" kern="0" dirty="0">
+                <a:solidFill>
+                  <a:srgbClr val="AFA893"/>
+                </a:solidFill>
+                <a:latin typeface="Arial" pitchFamily="34" charset="0"/>
+                <a:ea typeface="Arial" pitchFamily="34" charset="-122"/>
+                <a:cs typeface="Arial" pitchFamily="34" charset="-120"/>
+              </a:rPr>
+              <a:t>8</a:t>
+            </a:r>
+            <a:endParaRPr lang="en-US" sz="900" dirty="0"/>
+          </a:p>
+        </p:txBody>
+      </p:sp>
+      <p:sp>
+        <p:nvSpPr>
+          <p:cNvPr id="9" name="Shape 7"/>
           <p:cNvSpPr/>
           <p:nvPr/>
         </p:nvSpPr>
@@ -20141,7 +20219,7 @@
       </p:sp>
       <p:sp>
         <p:nvSpPr>
-          <p:cNvPr id="9" name="Text 7"/>
+          <p:cNvPr id="10" name="Text 8"/>
           <p:cNvSpPr/>
           <p:nvPr/>
         </p:nvSpPr>
@@ -20180,7 +20258,7 @@
       </p:sp>
       <p:sp>
         <p:nvSpPr>
-          <p:cNvPr id="10" name="Text 8"/>
+          <p:cNvPr id="11" name="Text 9"/>
           <p:cNvSpPr/>
           <p:nvPr/>
         </p:nvSpPr>
